--- a/prompt-engineering-course/prompt_engineering_presentation_support/PE_S5_context-retrieval.pptx
+++ b/prompt-engineering-course/prompt_engineering_presentation_support/PE_S5_context-retrieval.pptx
@@ -4203,7 +4203,7 @@
     <p:bg>
       <p:bgPr>
         <a:solidFill>
-          <a:srgbClr val="281C16"/>
+          <a:srgbClr val="301A12"/>
         </a:solidFill>
       </p:bgPr>
     </p:bg>
@@ -4229,12 +4229,12 @@
         </p:nvSpPr>
         <p:spPr>
           <a:xfrm>
-            <a:off x="10588752" y="502920"/>
-            <a:ext cx="1051560" cy="384048"/>
+            <a:off x="10405872" y="457200"/>
+            <a:ext cx="1234440" cy="457200"/>
           </a:xfrm>
           <a:prstGeom prst="roundRect">
             <a:avLst>
-              <a:gd name="adj" fmla="val 47619"/>
+              <a:gd name="adj" fmla="val 20000"/>
             </a:avLst>
           </a:prstGeom>
           <a:solidFill>
@@ -4251,8 +4251,8 @@
         </p:nvSpPr>
         <p:spPr>
           <a:xfrm>
-            <a:off x="10588752" y="502920"/>
-            <a:ext cx="1051560" cy="384048"/>
+            <a:off x="10405872" y="457200"/>
+            <a:ext cx="1234440" cy="457200"/>
           </a:xfrm>
           <a:prstGeom prst="rect">
             <a:avLst/>
@@ -4268,17 +4268,17 @@
               <a:buNone/>
             </a:pPr>
             <a:r>
-              <a:rPr lang="en-US" sz="1300" b="1" spc="200" kern="0" dirty="0">
-                <a:solidFill>
-                  <a:srgbClr val="281C16"/>
+              <a:rPr lang="en-US" sz="1400" b="1" spc="200" kern="0" dirty="0">
+                <a:solidFill>
+                  <a:srgbClr val="301A12"/>
                 </a:solidFill>
                 <a:latin typeface="Courier New" pitchFamily="34" charset="0"/>
                 <a:ea typeface="Courier New" pitchFamily="34" charset="-122"/>
                 <a:cs typeface="Courier New" pitchFamily="34" charset="-120"/>
               </a:rPr>
-              <a:t>GIT</a:t>
-            </a:r>
-            <a:endParaRPr lang="en-US" sz="1300" dirty="0"/>
+              <a:t>● GIT</a:t>
+            </a:r>
+            <a:endParaRPr lang="en-US" sz="1400" dirty="0"/>
           </a:p>
         </p:txBody>
       </p:sp>
@@ -4348,7 +4348,7 @@
             <a:r>
               <a:rPr lang="en-US" sz="3400" b="1" dirty="0">
                 <a:solidFill>
-                  <a:srgbClr val="C0CAF5"/>
+                  <a:srgbClr val="F6E6DB"/>
                 </a:solidFill>
                 <a:latin typeface="Calibri" pitchFamily="34" charset="0"/>
                 <a:ea typeface="Calibri" pitchFamily="34" charset="-122"/>
@@ -4391,7 +4391,7 @@
             <a:r>
               <a:rPr lang="en-US" sz="1500" dirty="0">
                 <a:solidFill>
-                  <a:srgbClr val="A9B1D6"/>
+                  <a:srgbClr val="E0C6B6"/>
                 </a:solidFill>
                 <a:latin typeface="Calibri" pitchFamily="34" charset="0"/>
                 <a:ea typeface="Calibri" pitchFamily="34" charset="-122"/>
@@ -4412,7 +4412,7 @@
             <a:r>
               <a:rPr lang="en-US" sz="1500" dirty="0">
                 <a:solidFill>
-                  <a:srgbClr val="A9B1D6"/>
+                  <a:srgbClr val="E0C6B6"/>
                 </a:solidFill>
                 <a:latin typeface="Calibri" pitchFamily="34" charset="0"/>
                 <a:ea typeface="Calibri" pitchFamily="34" charset="-122"/>
@@ -4433,7 +4433,7 @@
             <a:r>
               <a:rPr lang="en-US" sz="1500" dirty="0">
                 <a:solidFill>
-                  <a:srgbClr val="A9B1D6"/>
+                  <a:srgbClr val="E0C6B6"/>
                 </a:solidFill>
                 <a:latin typeface="Calibri" pitchFamily="34" charset="0"/>
                 <a:ea typeface="Calibri" pitchFamily="34" charset="-122"/>
@@ -4454,7 +4454,7 @@
             <a:r>
               <a:rPr lang="en-US" sz="1500" dirty="0">
                 <a:solidFill>
-                  <a:srgbClr val="A9B1D6"/>
+                  <a:srgbClr val="E0C6B6"/>
                 </a:solidFill>
                 <a:latin typeface="Calibri" pitchFamily="34" charset="0"/>
                 <a:ea typeface="Calibri" pitchFamily="34" charset="-122"/>
@@ -4483,11 +4483,11 @@
             </a:avLst>
           </a:prstGeom>
           <a:solidFill>
-            <a:srgbClr val="16161E"/>
+            <a:srgbClr val="22120B"/>
           </a:solidFill>
           <a:ln w="12700">
             <a:solidFill>
-              <a:srgbClr val="2A2E42"/>
+              <a:srgbClr val="5C3421"/>
             </a:solidFill>
             <a:prstDash val="solid"/>
           </a:ln>
@@ -4985,8 +4985,47 @@
         </p:nvSpPr>
         <p:spPr>
           <a:xfrm>
-            <a:off x="548640" y="2011680"/>
-            <a:ext cx="6126480" cy="3840480"/>
+            <a:off x="548640" y="1627632"/>
+            <a:ext cx="10881360" cy="502920"/>
+          </a:xfrm>
+          <a:prstGeom prst="rect">
+            <a:avLst/>
+          </a:prstGeom>
+          <a:noFill/>
+          <a:ln/>
+        </p:spPr>
+        <p:txBody>
+          <a:bodyPr wrap="square" lIns="0" tIns="0" rIns="0" bIns="0" rtlCol="0" anchor="t"/>
+          <a:lstStyle/>
+          <a:p>
+            <a:pPr algn="l" indent="0" marL="0">
+              <a:buNone/>
+            </a:pPr>
+            <a:r>
+              <a:rPr lang="en-US" sz="1500" dirty="0">
+                <a:solidFill>
+                  <a:srgbClr val="A9B1D6"/>
+                </a:solidFill>
+                <a:latin typeface="Calibri" pitchFamily="34" charset="0"/>
+                <a:ea typeface="Calibri" pitchFamily="34" charset="-122"/>
+                <a:cs typeface="Calibri" pitchFamily="34" charset="-120"/>
+              </a:rPr>
+              <a:t>Here's the mental shift that defines the modern job — from polishing sentences to deciding what fills the window.</a:t>
+            </a:r>
+            <a:endParaRPr lang="en-US" sz="1500" dirty="0"/>
+          </a:p>
+        </p:txBody>
+      </p:sp>
+      <p:sp>
+        <p:nvSpPr>
+          <p:cNvPr id="5" name="Text 3"/>
+          <p:cNvSpPr txBox="1"/>
+          <p:nvPr/>
+        </p:nvSpPr>
+        <p:spPr>
+          <a:xfrm>
+            <a:off x="548640" y="2340864"/>
+            <a:ext cx="6126480" cy="3511296"/>
           </a:xfrm>
           <a:prstGeom prst="rect">
             <a:avLst/>
@@ -5124,18 +5163,18 @@
       </p:sp>
       <p:sp>
         <p:nvSpPr>
-          <p:cNvPr id="5" name="Shape 3"/>
+          <p:cNvPr id="6" name="Shape 4"/>
           <p:cNvSpPr/>
           <p:nvPr/>
         </p:nvSpPr>
         <p:spPr>
           <a:xfrm>
-            <a:off x="6995160" y="2148840"/>
-            <a:ext cx="4645152" cy="3383280"/>
+            <a:off x="6995160" y="2478024"/>
+            <a:ext cx="4645152" cy="3054096"/>
           </a:xfrm>
           <a:prstGeom prst="roundRect">
             <a:avLst>
-              <a:gd name="adj" fmla="val 2432"/>
+              <a:gd name="adj" fmla="val 2695"/>
             </a:avLst>
           </a:prstGeom>
           <a:solidFill>
@@ -5151,13 +5190,13 @@
       </p:sp>
       <p:sp>
         <p:nvSpPr>
-          <p:cNvPr id="6" name="Shape 4"/>
+          <p:cNvPr id="7" name="Shape 5"/>
           <p:cNvSpPr/>
           <p:nvPr/>
         </p:nvSpPr>
         <p:spPr>
           <a:xfrm>
-            <a:off x="7269480" y="2423160"/>
+            <a:off x="7269480" y="2752344"/>
             <a:ext cx="457200" cy="457200"/>
           </a:xfrm>
           <a:prstGeom prst="ellipse">
@@ -5171,13 +5210,13 @@
       </p:sp>
       <p:sp>
         <p:nvSpPr>
-          <p:cNvPr id="7" name="Text 5"/>
-          <p:cNvSpPr txBox="1"/>
-          <p:nvPr/>
-        </p:nvSpPr>
-        <p:spPr>
-          <a:xfrm>
-            <a:off x="7818120" y="2450592"/>
+          <p:cNvPr id="8" name="Text 6"/>
+          <p:cNvSpPr txBox="1"/>
+          <p:nvPr/>
+        </p:nvSpPr>
+        <p:spPr>
+          <a:xfrm>
+            <a:off x="7818120" y="2779776"/>
             <a:ext cx="3657600" cy="411480"/>
           </a:xfrm>
           <a:prstGeom prst="rect">
@@ -5210,14 +5249,14 @@
       </p:sp>
       <p:sp>
         <p:nvSpPr>
-          <p:cNvPr id="8" name="Text 6"/>
-          <p:cNvSpPr txBox="1"/>
-          <p:nvPr/>
-        </p:nvSpPr>
-        <p:spPr>
-          <a:xfrm>
-            <a:off x="7269480" y="3108960"/>
-            <a:ext cx="4160520" cy="2286000"/>
+          <p:cNvPr id="9" name="Text 7"/>
+          <p:cNvSpPr txBox="1"/>
+          <p:nvPr/>
+        </p:nvSpPr>
+        <p:spPr>
+          <a:xfrm>
+            <a:off x="7269480" y="3438144"/>
+            <a:ext cx="4160520" cy="1865376"/>
           </a:xfrm>
           <a:prstGeom prst="rect">
             <a:avLst/>
@@ -5249,7 +5288,7 @@
       </p:sp>
       <p:sp>
         <p:nvSpPr>
-          <p:cNvPr id="9" name="Shape 7"/>
+          <p:cNvPr id="10" name="Shape 8"/>
           <p:cNvSpPr/>
           <p:nvPr/>
         </p:nvSpPr>
@@ -5271,7 +5310,7 @@
       </p:sp>
       <p:sp>
         <p:nvSpPr>
-          <p:cNvPr id="10" name="Text 8"/>
+          <p:cNvPr id="11" name="Text 9"/>
           <p:cNvSpPr txBox="1"/>
           <p:nvPr/>
         </p:nvSpPr>
@@ -5310,7 +5349,7 @@
       </p:sp>
       <p:sp>
         <p:nvSpPr>
-          <p:cNvPr id="11" name="Text 9"/>
+          <p:cNvPr id="12" name="Text 10"/>
           <p:cNvSpPr txBox="1"/>
           <p:nvPr/>
         </p:nvSpPr>
@@ -5349,7 +5388,7 @@
       </p:sp>
       <p:sp>
         <p:nvSpPr>
-          <p:cNvPr id="12" name="Text 10"/>
+          <p:cNvPr id="13" name="Text 11"/>
           <p:cNvSpPr txBox="1"/>
           <p:nvPr/>
         </p:nvSpPr>
@@ -5498,13 +5537,52 @@
       </p:sp>
       <p:sp>
         <p:nvSpPr>
-          <p:cNvPr id="4" name="Shape 2"/>
+          <p:cNvPr id="4" name="Text 2"/>
+          <p:cNvSpPr txBox="1"/>
+          <p:nvPr/>
+        </p:nvSpPr>
+        <p:spPr>
+          <a:xfrm>
+            <a:off x="548640" y="1627632"/>
+            <a:ext cx="10881360" cy="502920"/>
+          </a:xfrm>
+          <a:prstGeom prst="rect">
+            <a:avLst/>
+          </a:prstGeom>
+          <a:noFill/>
+          <a:ln/>
+        </p:spPr>
+        <p:txBody>
+          <a:bodyPr wrap="square" lIns="0" tIns="0" rIns="0" bIns="0" rtlCol="0" anchor="t"/>
+          <a:lstStyle/>
+          <a:p>
+            <a:pPr algn="l" indent="0" marL="0">
+              <a:buNone/>
+            </a:pPr>
+            <a:r>
+              <a:rPr lang="en-US" sz="1500" dirty="0">
+                <a:solidFill>
+                  <a:srgbClr val="A9B1D6"/>
+                </a:solidFill>
+                <a:latin typeface="Calibri" pitchFamily="34" charset="0"/>
+                <a:ea typeface="Calibri" pitchFamily="34" charset="-122"/>
+                <a:cs typeface="Calibri" pitchFamily="34" charset="-120"/>
+              </a:rPr>
+              <a:t>RAG isn't magic; it's four plain steps that end in 'assemble the right context, then ask'.</a:t>
+            </a:r>
+            <a:endParaRPr lang="en-US" sz="1500" dirty="0"/>
+          </a:p>
+        </p:txBody>
+      </p:sp>
+      <p:sp>
+        <p:nvSpPr>
+          <p:cNvPr id="5" name="Shape 3"/>
           <p:cNvSpPr/>
           <p:nvPr/>
         </p:nvSpPr>
         <p:spPr>
           <a:xfrm>
-            <a:off x="548640" y="2103120"/>
+            <a:off x="548640" y="2432304"/>
             <a:ext cx="530352" cy="530352"/>
           </a:xfrm>
           <a:prstGeom prst="ellipse">
@@ -5518,13 +5596,13 @@
       </p:sp>
       <p:sp>
         <p:nvSpPr>
-          <p:cNvPr id="5" name="Text 3"/>
-          <p:cNvSpPr txBox="1"/>
-          <p:nvPr/>
-        </p:nvSpPr>
-        <p:spPr>
-          <a:xfrm>
-            <a:off x="548640" y="2103120"/>
+          <p:cNvPr id="6" name="Text 4"/>
+          <p:cNvSpPr txBox="1"/>
+          <p:nvPr/>
+        </p:nvSpPr>
+        <p:spPr>
+          <a:xfrm>
+            <a:off x="548640" y="2432304"/>
             <a:ext cx="530352" cy="530352"/>
           </a:xfrm>
           <a:prstGeom prst="rect">
@@ -5557,13 +5635,13 @@
       </p:sp>
       <p:sp>
         <p:nvSpPr>
-          <p:cNvPr id="6" name="Text 4"/>
-          <p:cNvSpPr txBox="1"/>
-          <p:nvPr/>
-        </p:nvSpPr>
-        <p:spPr>
-          <a:xfrm>
-            <a:off x="1325880" y="2084832"/>
+          <p:cNvPr id="7" name="Text 5"/>
+          <p:cNvSpPr txBox="1"/>
+          <p:nvPr/>
+        </p:nvSpPr>
+        <p:spPr>
+          <a:xfrm>
+            <a:off x="1325880" y="2414016"/>
             <a:ext cx="10424160" cy="411480"/>
           </a:xfrm>
           <a:prstGeom prst="rect">
@@ -5596,14 +5674,14 @@
       </p:sp>
       <p:sp>
         <p:nvSpPr>
-          <p:cNvPr id="7" name="Text 5"/>
-          <p:cNvSpPr txBox="1"/>
-          <p:nvPr/>
-        </p:nvSpPr>
-        <p:spPr>
-          <a:xfrm>
-            <a:off x="1325880" y="2468880"/>
-            <a:ext cx="10424160" cy="667512"/>
+          <p:cNvPr id="8" name="Text 6"/>
+          <p:cNvSpPr txBox="1"/>
+          <p:nvPr/>
+        </p:nvSpPr>
+        <p:spPr>
+          <a:xfrm>
+            <a:off x="1325880" y="2798064"/>
+            <a:ext cx="10424160" cy="585216"/>
           </a:xfrm>
           <a:prstGeom prst="rect">
             <a:avLst/>
@@ -5635,13 +5713,13 @@
       </p:sp>
       <p:sp>
         <p:nvSpPr>
-          <p:cNvPr id="8" name="Shape 6"/>
+          <p:cNvPr id="9" name="Shape 7"/>
           <p:cNvSpPr/>
           <p:nvPr/>
         </p:nvSpPr>
         <p:spPr>
           <a:xfrm>
-            <a:off x="548640" y="3209544"/>
+            <a:off x="548640" y="3456432"/>
             <a:ext cx="530352" cy="530352"/>
           </a:xfrm>
           <a:prstGeom prst="ellipse">
@@ -5655,13 +5733,13 @@
       </p:sp>
       <p:sp>
         <p:nvSpPr>
-          <p:cNvPr id="9" name="Text 7"/>
-          <p:cNvSpPr txBox="1"/>
-          <p:nvPr/>
-        </p:nvSpPr>
-        <p:spPr>
-          <a:xfrm>
-            <a:off x="548640" y="3209544"/>
+          <p:cNvPr id="10" name="Text 8"/>
+          <p:cNvSpPr txBox="1"/>
+          <p:nvPr/>
+        </p:nvSpPr>
+        <p:spPr>
+          <a:xfrm>
+            <a:off x="548640" y="3456432"/>
             <a:ext cx="530352" cy="530352"/>
           </a:xfrm>
           <a:prstGeom prst="rect">
@@ -5694,13 +5772,13 @@
       </p:sp>
       <p:sp>
         <p:nvSpPr>
-          <p:cNvPr id="10" name="Text 8"/>
-          <p:cNvSpPr txBox="1"/>
-          <p:nvPr/>
-        </p:nvSpPr>
-        <p:spPr>
-          <a:xfrm>
-            <a:off x="1325880" y="3191256"/>
+          <p:cNvPr id="11" name="Text 9"/>
+          <p:cNvSpPr txBox="1"/>
+          <p:nvPr/>
+        </p:nvSpPr>
+        <p:spPr>
+          <a:xfrm>
+            <a:off x="1325880" y="3438144"/>
             <a:ext cx="10424160" cy="411480"/>
           </a:xfrm>
           <a:prstGeom prst="rect">
@@ -5733,14 +5811,14 @@
       </p:sp>
       <p:sp>
         <p:nvSpPr>
-          <p:cNvPr id="11" name="Text 9"/>
-          <p:cNvSpPr txBox="1"/>
-          <p:nvPr/>
-        </p:nvSpPr>
-        <p:spPr>
-          <a:xfrm>
-            <a:off x="1325880" y="3575304"/>
-            <a:ext cx="10424160" cy="667512"/>
+          <p:cNvPr id="12" name="Text 10"/>
+          <p:cNvSpPr txBox="1"/>
+          <p:nvPr/>
+        </p:nvSpPr>
+        <p:spPr>
+          <a:xfrm>
+            <a:off x="1325880" y="3822192"/>
+            <a:ext cx="10424160" cy="585216"/>
           </a:xfrm>
           <a:prstGeom prst="rect">
             <a:avLst/>
@@ -5772,13 +5850,13 @@
       </p:sp>
       <p:sp>
         <p:nvSpPr>
-          <p:cNvPr id="12" name="Shape 10"/>
+          <p:cNvPr id="13" name="Shape 11"/>
           <p:cNvSpPr/>
           <p:nvPr/>
         </p:nvSpPr>
         <p:spPr>
           <a:xfrm>
-            <a:off x="548640" y="4315968"/>
+            <a:off x="548640" y="4480560"/>
             <a:ext cx="530352" cy="530352"/>
           </a:xfrm>
           <a:prstGeom prst="ellipse">
@@ -5792,13 +5870,13 @@
       </p:sp>
       <p:sp>
         <p:nvSpPr>
-          <p:cNvPr id="13" name="Text 11"/>
-          <p:cNvSpPr txBox="1"/>
-          <p:nvPr/>
-        </p:nvSpPr>
-        <p:spPr>
-          <a:xfrm>
-            <a:off x="548640" y="4315968"/>
+          <p:cNvPr id="14" name="Text 12"/>
+          <p:cNvSpPr txBox="1"/>
+          <p:nvPr/>
+        </p:nvSpPr>
+        <p:spPr>
+          <a:xfrm>
+            <a:off x="548640" y="4480560"/>
             <a:ext cx="530352" cy="530352"/>
           </a:xfrm>
           <a:prstGeom prst="rect">
@@ -5831,13 +5909,13 @@
       </p:sp>
       <p:sp>
         <p:nvSpPr>
-          <p:cNvPr id="14" name="Text 12"/>
-          <p:cNvSpPr txBox="1"/>
-          <p:nvPr/>
-        </p:nvSpPr>
-        <p:spPr>
-          <a:xfrm>
-            <a:off x="1325880" y="4297680"/>
+          <p:cNvPr id="15" name="Text 13"/>
+          <p:cNvSpPr txBox="1"/>
+          <p:nvPr/>
+        </p:nvSpPr>
+        <p:spPr>
+          <a:xfrm>
+            <a:off x="1325880" y="4462272"/>
             <a:ext cx="10424160" cy="411480"/>
           </a:xfrm>
           <a:prstGeom prst="rect">
@@ -5870,14 +5948,14 @@
       </p:sp>
       <p:sp>
         <p:nvSpPr>
-          <p:cNvPr id="15" name="Text 13"/>
-          <p:cNvSpPr txBox="1"/>
-          <p:nvPr/>
-        </p:nvSpPr>
-        <p:spPr>
-          <a:xfrm>
-            <a:off x="1325880" y="4681728"/>
-            <a:ext cx="10424160" cy="667512"/>
+          <p:cNvPr id="16" name="Text 14"/>
+          <p:cNvSpPr txBox="1"/>
+          <p:nvPr/>
+        </p:nvSpPr>
+        <p:spPr>
+          <a:xfrm>
+            <a:off x="1325880" y="4846320"/>
+            <a:ext cx="10424160" cy="585216"/>
           </a:xfrm>
           <a:prstGeom prst="rect">
             <a:avLst/>
@@ -5909,13 +5987,13 @@
       </p:sp>
       <p:sp>
         <p:nvSpPr>
-          <p:cNvPr id="16" name="Shape 14"/>
+          <p:cNvPr id="17" name="Shape 15"/>
           <p:cNvSpPr/>
           <p:nvPr/>
         </p:nvSpPr>
         <p:spPr>
           <a:xfrm>
-            <a:off x="548640" y="5422392"/>
+            <a:off x="548640" y="5504688"/>
             <a:ext cx="530352" cy="530352"/>
           </a:xfrm>
           <a:prstGeom prst="ellipse">
@@ -5929,13 +6007,13 @@
       </p:sp>
       <p:sp>
         <p:nvSpPr>
-          <p:cNvPr id="17" name="Text 15"/>
-          <p:cNvSpPr txBox="1"/>
-          <p:nvPr/>
-        </p:nvSpPr>
-        <p:spPr>
-          <a:xfrm>
-            <a:off x="548640" y="5422392"/>
+          <p:cNvPr id="18" name="Text 16"/>
+          <p:cNvSpPr txBox="1"/>
+          <p:nvPr/>
+        </p:nvSpPr>
+        <p:spPr>
+          <a:xfrm>
+            <a:off x="548640" y="5504688"/>
             <a:ext cx="530352" cy="530352"/>
           </a:xfrm>
           <a:prstGeom prst="rect">
@@ -5968,13 +6046,13 @@
       </p:sp>
       <p:sp>
         <p:nvSpPr>
-          <p:cNvPr id="18" name="Text 16"/>
-          <p:cNvSpPr txBox="1"/>
-          <p:nvPr/>
-        </p:nvSpPr>
-        <p:spPr>
-          <a:xfrm>
-            <a:off x="1325880" y="5404104"/>
+          <p:cNvPr id="19" name="Text 17"/>
+          <p:cNvSpPr txBox="1"/>
+          <p:nvPr/>
+        </p:nvSpPr>
+        <p:spPr>
+          <a:xfrm>
+            <a:off x="1325880" y="5486400"/>
             <a:ext cx="10424160" cy="411480"/>
           </a:xfrm>
           <a:prstGeom prst="rect">
@@ -6007,14 +6085,14 @@
       </p:sp>
       <p:sp>
         <p:nvSpPr>
-          <p:cNvPr id="19" name="Text 17"/>
-          <p:cNvSpPr txBox="1"/>
-          <p:nvPr/>
-        </p:nvSpPr>
-        <p:spPr>
-          <a:xfrm>
-            <a:off x="1325880" y="5788152"/>
-            <a:ext cx="10424160" cy="667512"/>
+          <p:cNvPr id="20" name="Text 18"/>
+          <p:cNvSpPr txBox="1"/>
+          <p:nvPr/>
+        </p:nvSpPr>
+        <p:spPr>
+          <a:xfrm>
+            <a:off x="1325880" y="5870448"/>
+            <a:ext cx="10424160" cy="585216"/>
           </a:xfrm>
           <a:prstGeom prst="rect">
             <a:avLst/>
@@ -6046,7 +6124,7 @@
       </p:sp>
       <p:sp>
         <p:nvSpPr>
-          <p:cNvPr id="20" name="Shape 18"/>
+          <p:cNvPr id="21" name="Shape 19"/>
           <p:cNvSpPr/>
           <p:nvPr/>
         </p:nvSpPr>
@@ -6068,7 +6146,7 @@
       </p:sp>
       <p:sp>
         <p:nvSpPr>
-          <p:cNvPr id="21" name="Text 19"/>
+          <p:cNvPr id="22" name="Text 20"/>
           <p:cNvSpPr txBox="1"/>
           <p:nvPr/>
         </p:nvSpPr>
@@ -6107,7 +6185,7 @@
       </p:sp>
       <p:sp>
         <p:nvSpPr>
-          <p:cNvPr id="22" name="Text 20"/>
+          <p:cNvPr id="23" name="Text 21"/>
           <p:cNvSpPr txBox="1"/>
           <p:nvPr/>
         </p:nvSpPr>
@@ -6146,7 +6224,7 @@
       </p:sp>
       <p:sp>
         <p:nvSpPr>
-          <p:cNvPr id="23" name="Text 21"/>
+          <p:cNvPr id="24" name="Text 22"/>
           <p:cNvSpPr txBox="1"/>
           <p:nvPr/>
         </p:nvSpPr>
@@ -6301,8 +6379,47 @@
         </p:nvSpPr>
         <p:spPr>
           <a:xfrm>
-            <a:off x="548640" y="2011680"/>
-            <a:ext cx="6126480" cy="3840480"/>
+            <a:off x="548640" y="1627632"/>
+            <a:ext cx="10881360" cy="502920"/>
+          </a:xfrm>
+          <a:prstGeom prst="rect">
+            <a:avLst/>
+          </a:prstGeom>
+          <a:noFill/>
+          <a:ln/>
+        </p:spPr>
+        <p:txBody>
+          <a:bodyPr wrap="square" lIns="0" tIns="0" rIns="0" bIns="0" rtlCol="0" anchor="t"/>
+          <a:lstStyle/>
+          <a:p>
+            <a:pPr algn="l" indent="0" marL="0">
+              <a:buNone/>
+            </a:pPr>
+            <a:r>
+              <a:rPr lang="en-US" sz="1500" dirty="0">
+                <a:solidFill>
+                  <a:srgbClr val="A9B1D6"/>
+                </a:solidFill>
+                <a:latin typeface="Calibri" pitchFamily="34" charset="0"/>
+                <a:ea typeface="Calibri" pitchFamily="34" charset="-122"/>
+                <a:cs typeface="Calibri" pitchFamily="34" charset="-120"/>
+              </a:rPr>
+              <a:t>The engine under retrieval is simpler than it sounds — a way to find text that means the same thing, not just matching words.</a:t>
+            </a:r>
+            <a:endParaRPr lang="en-US" sz="1500" dirty="0"/>
+          </a:p>
+        </p:txBody>
+      </p:sp>
+      <p:sp>
+        <p:nvSpPr>
+          <p:cNvPr id="5" name="Text 3"/>
+          <p:cNvSpPr txBox="1"/>
+          <p:nvPr/>
+        </p:nvSpPr>
+        <p:spPr>
+          <a:xfrm>
+            <a:off x="548640" y="2340864"/>
+            <a:ext cx="6126480" cy="3511296"/>
           </a:xfrm>
           <a:prstGeom prst="rect">
             <a:avLst/>
@@ -6440,18 +6557,18 @@
       </p:sp>
       <p:sp>
         <p:nvSpPr>
-          <p:cNvPr id="5" name="Shape 3"/>
+          <p:cNvPr id="6" name="Shape 4"/>
           <p:cNvSpPr/>
           <p:nvPr/>
         </p:nvSpPr>
         <p:spPr>
           <a:xfrm>
-            <a:off x="6995160" y="2148840"/>
-            <a:ext cx="4645152" cy="3383280"/>
+            <a:off x="6995160" y="2478024"/>
+            <a:ext cx="4645152" cy="3054096"/>
           </a:xfrm>
           <a:prstGeom prst="roundRect">
             <a:avLst>
-              <a:gd name="adj" fmla="val 2432"/>
+              <a:gd name="adj" fmla="val 2695"/>
             </a:avLst>
           </a:prstGeom>
           <a:solidFill>
@@ -6467,13 +6584,13 @@
       </p:sp>
       <p:sp>
         <p:nvSpPr>
-          <p:cNvPr id="6" name="Shape 4"/>
+          <p:cNvPr id="7" name="Shape 5"/>
           <p:cNvSpPr/>
           <p:nvPr/>
         </p:nvSpPr>
         <p:spPr>
           <a:xfrm>
-            <a:off x="7269480" y="2423160"/>
+            <a:off x="7269480" y="2752344"/>
             <a:ext cx="457200" cy="457200"/>
           </a:xfrm>
           <a:prstGeom prst="ellipse">
@@ -6487,13 +6604,13 @@
       </p:sp>
       <p:sp>
         <p:nvSpPr>
-          <p:cNvPr id="7" name="Text 5"/>
-          <p:cNvSpPr txBox="1"/>
-          <p:nvPr/>
-        </p:nvSpPr>
-        <p:spPr>
-          <a:xfrm>
-            <a:off x="7818120" y="2450592"/>
+          <p:cNvPr id="8" name="Text 6"/>
+          <p:cNvSpPr txBox="1"/>
+          <p:nvPr/>
+        </p:nvSpPr>
+        <p:spPr>
+          <a:xfrm>
+            <a:off x="7818120" y="2779776"/>
             <a:ext cx="3657600" cy="411480"/>
           </a:xfrm>
           <a:prstGeom prst="rect">
@@ -6526,14 +6643,14 @@
       </p:sp>
       <p:sp>
         <p:nvSpPr>
-          <p:cNvPr id="8" name="Text 6"/>
-          <p:cNvSpPr txBox="1"/>
-          <p:nvPr/>
-        </p:nvSpPr>
-        <p:spPr>
-          <a:xfrm>
-            <a:off x="7269480" y="3108960"/>
-            <a:ext cx="4160520" cy="2286000"/>
+          <p:cNvPr id="9" name="Text 7"/>
+          <p:cNvSpPr txBox="1"/>
+          <p:nvPr/>
+        </p:nvSpPr>
+        <p:spPr>
+          <a:xfrm>
+            <a:off x="7269480" y="3438144"/>
+            <a:ext cx="4160520" cy="1865376"/>
           </a:xfrm>
           <a:prstGeom prst="rect">
             <a:avLst/>
@@ -6565,7 +6682,7 @@
       </p:sp>
       <p:sp>
         <p:nvSpPr>
-          <p:cNvPr id="9" name="Shape 7"/>
+          <p:cNvPr id="10" name="Shape 8"/>
           <p:cNvSpPr/>
           <p:nvPr/>
         </p:nvSpPr>
@@ -6587,7 +6704,7 @@
       </p:sp>
       <p:sp>
         <p:nvSpPr>
-          <p:cNvPr id="10" name="Text 8"/>
+          <p:cNvPr id="11" name="Text 9"/>
           <p:cNvSpPr txBox="1"/>
           <p:nvPr/>
         </p:nvSpPr>
@@ -6626,7 +6743,7 @@
       </p:sp>
       <p:sp>
         <p:nvSpPr>
-          <p:cNvPr id="11" name="Text 9"/>
+          <p:cNvPr id="12" name="Text 10"/>
           <p:cNvSpPr txBox="1"/>
           <p:nvPr/>
         </p:nvSpPr>
@@ -6665,7 +6782,7 @@
       </p:sp>
       <p:sp>
         <p:nvSpPr>
-          <p:cNvPr id="12" name="Text 10"/>
+          <p:cNvPr id="13" name="Text 11"/>
           <p:cNvSpPr txBox="1"/>
           <p:nvPr/>
         </p:nvSpPr>
@@ -6820,8 +6937,47 @@
         </p:nvSpPr>
         <p:spPr>
           <a:xfrm>
-            <a:off x="548640" y="2057400"/>
-            <a:ext cx="4709160" cy="3749040"/>
+            <a:off x="548640" y="1627632"/>
+            <a:ext cx="10881360" cy="502920"/>
+          </a:xfrm>
+          <a:prstGeom prst="rect">
+            <a:avLst/>
+          </a:prstGeom>
+          <a:noFill/>
+          <a:ln/>
+        </p:spPr>
+        <p:txBody>
+          <a:bodyPr wrap="square" lIns="0" tIns="0" rIns="0" bIns="0" rtlCol="0" anchor="t"/>
+          <a:lstStyle/>
+          <a:p>
+            <a:pPr algn="l" indent="0" marL="0">
+              <a:buNone/>
+            </a:pPr>
+            <a:r>
+              <a:rPr lang="en-US" sz="1500" dirty="0">
+                <a:solidFill>
+                  <a:srgbClr val="A9B1D6"/>
+                </a:solidFill>
+                <a:latin typeface="Calibri" pitchFamily="34" charset="0"/>
+                <a:ea typeface="Calibri" pitchFamily="34" charset="-122"/>
+                <a:cs typeface="Calibri" pitchFamily="34" charset="-120"/>
+              </a:rPr>
+              <a:t>Three small instructions turn a confident guesser into a source-backed answerer — here's the workhorse prompt.</a:t>
+            </a:r>
+            <a:endParaRPr lang="en-US" sz="1500" dirty="0"/>
+          </a:p>
+        </p:txBody>
+      </p:sp>
+      <p:sp>
+        <p:nvSpPr>
+          <p:cNvPr id="5" name="Text 3"/>
+          <p:cNvSpPr txBox="1"/>
+          <p:nvPr/>
+        </p:nvSpPr>
+        <p:spPr>
+          <a:xfrm>
+            <a:off x="548640" y="2386584"/>
+            <a:ext cx="4709160" cy="3419856"/>
           </a:xfrm>
           <a:prstGeom prst="rect">
             <a:avLst/>
@@ -6959,18 +7115,18 @@
       </p:sp>
       <p:sp>
         <p:nvSpPr>
-          <p:cNvPr id="5" name="Shape 3"/>
+          <p:cNvPr id="6" name="Shape 4"/>
           <p:cNvSpPr/>
           <p:nvPr/>
         </p:nvSpPr>
         <p:spPr>
           <a:xfrm>
-            <a:off x="5532120" y="2057400"/>
-            <a:ext cx="6108192" cy="3794760"/>
+            <a:off x="5532120" y="2386584"/>
+            <a:ext cx="6108192" cy="3465576"/>
           </a:xfrm>
           <a:prstGeom prst="roundRect">
             <a:avLst>
-              <a:gd name="adj" fmla="val 1446"/>
+              <a:gd name="adj" fmla="val 1583"/>
             </a:avLst>
           </a:prstGeom>
           <a:solidFill>
@@ -6986,13 +7142,13 @@
       </p:sp>
       <p:sp>
         <p:nvSpPr>
-          <p:cNvPr id="6" name="Text 4"/>
-          <p:cNvSpPr txBox="1"/>
-          <p:nvPr/>
-        </p:nvSpPr>
-        <p:spPr>
-          <a:xfrm>
-            <a:off x="5760720" y="2194560"/>
+          <p:cNvPr id="7" name="Text 5"/>
+          <p:cNvSpPr txBox="1"/>
+          <p:nvPr/>
+        </p:nvSpPr>
+        <p:spPr>
+          <a:xfrm>
+            <a:off x="5760720" y="2523744"/>
             <a:ext cx="5650992" cy="320040"/>
           </a:xfrm>
           <a:prstGeom prst="rect">
@@ -7025,14 +7181,14 @@
       </p:sp>
       <p:sp>
         <p:nvSpPr>
-          <p:cNvPr id="7" name="Text 5"/>
-          <p:cNvSpPr txBox="1"/>
-          <p:nvPr/>
-        </p:nvSpPr>
-        <p:spPr>
-          <a:xfrm>
-            <a:off x="5788152" y="2560320"/>
-            <a:ext cx="5596128" cy="3108960"/>
+          <p:cNvPr id="8" name="Text 6"/>
+          <p:cNvSpPr txBox="1"/>
+          <p:nvPr/>
+        </p:nvSpPr>
+        <p:spPr>
+          <a:xfrm>
+            <a:off x="5788152" y="2889504"/>
+            <a:ext cx="5596128" cy="2779776"/>
           </a:xfrm>
           <a:prstGeom prst="rect">
             <a:avLst/>
@@ -7187,7 +7343,7 @@
       </p:sp>
       <p:sp>
         <p:nvSpPr>
-          <p:cNvPr id="8" name="Shape 6"/>
+          <p:cNvPr id="9" name="Shape 7"/>
           <p:cNvSpPr/>
           <p:nvPr/>
         </p:nvSpPr>
@@ -7209,7 +7365,7 @@
       </p:sp>
       <p:sp>
         <p:nvSpPr>
-          <p:cNvPr id="9" name="Text 7"/>
+          <p:cNvPr id="10" name="Text 8"/>
           <p:cNvSpPr txBox="1"/>
           <p:nvPr/>
         </p:nvSpPr>
@@ -7248,7 +7404,7 @@
       </p:sp>
       <p:sp>
         <p:nvSpPr>
-          <p:cNvPr id="10" name="Text 8"/>
+          <p:cNvPr id="11" name="Text 9"/>
           <p:cNvSpPr txBox="1"/>
           <p:nvPr/>
         </p:nvSpPr>
@@ -7287,7 +7443,7 @@
       </p:sp>
       <p:sp>
         <p:nvSpPr>
-          <p:cNvPr id="11" name="Text 9"/>
+          <p:cNvPr id="12" name="Text 10"/>
           <p:cNvSpPr txBox="1"/>
           <p:nvPr/>
         </p:nvSpPr>
@@ -7442,8 +7598,47 @@
         </p:nvSpPr>
         <p:spPr>
           <a:xfrm>
-            <a:off x="548640" y="2011680"/>
-            <a:ext cx="6126480" cy="3840480"/>
+            <a:off x="548640" y="1627632"/>
+            <a:ext cx="10881360" cy="502920"/>
+          </a:xfrm>
+          <a:prstGeom prst="rect">
+            <a:avLst/>
+          </a:prstGeom>
+          <a:noFill/>
+          <a:ln/>
+        </p:spPr>
+        <p:txBody>
+          <a:bodyPr wrap="square" lIns="0" tIns="0" rIns="0" bIns="0" rtlCol="0" anchor="t"/>
+          <a:lstStyle/>
+          <a:p>
+            <a:pPr algn="l" indent="0" marL="0">
+              <a:buNone/>
+            </a:pPr>
+            <a:r>
+              <a:rPr lang="en-US" sz="1500" dirty="0">
+                <a:solidFill>
+                  <a:srgbClr val="A9B1D6"/>
+                </a:solidFill>
+                <a:latin typeface="Calibri" pitchFamily="34" charset="0"/>
+                <a:ea typeface="Calibri" pitchFamily="34" charset="-122"/>
+                <a:cs typeface="Calibri" pitchFamily="34" charset="-120"/>
+              </a:rPr>
+              <a:t>More context feels safer, but it can quietly make answers worse — here's the catch nobody warns you about.</a:t>
+            </a:r>
+            <a:endParaRPr lang="en-US" sz="1500" dirty="0"/>
+          </a:p>
+        </p:txBody>
+      </p:sp>
+      <p:sp>
+        <p:nvSpPr>
+          <p:cNvPr id="5" name="Text 3"/>
+          <p:cNvSpPr txBox="1"/>
+          <p:nvPr/>
+        </p:nvSpPr>
+        <p:spPr>
+          <a:xfrm>
+            <a:off x="548640" y="2340864"/>
+            <a:ext cx="6126480" cy="3511296"/>
           </a:xfrm>
           <a:prstGeom prst="rect">
             <a:avLst/>
@@ -7581,18 +7776,18 @@
       </p:sp>
       <p:sp>
         <p:nvSpPr>
-          <p:cNvPr id="5" name="Shape 3"/>
+          <p:cNvPr id="6" name="Shape 4"/>
           <p:cNvSpPr/>
           <p:nvPr/>
         </p:nvSpPr>
         <p:spPr>
           <a:xfrm>
-            <a:off x="6995160" y="2148840"/>
-            <a:ext cx="4645152" cy="3383280"/>
+            <a:off x="6995160" y="2478024"/>
+            <a:ext cx="4645152" cy="3054096"/>
           </a:xfrm>
           <a:prstGeom prst="roundRect">
             <a:avLst>
-              <a:gd name="adj" fmla="val 2432"/>
+              <a:gd name="adj" fmla="val 2695"/>
             </a:avLst>
           </a:prstGeom>
           <a:solidFill>
@@ -7608,13 +7803,13 @@
       </p:sp>
       <p:sp>
         <p:nvSpPr>
-          <p:cNvPr id="6" name="Shape 4"/>
+          <p:cNvPr id="7" name="Shape 5"/>
           <p:cNvSpPr/>
           <p:nvPr/>
         </p:nvSpPr>
         <p:spPr>
           <a:xfrm>
-            <a:off x="7269480" y="2423160"/>
+            <a:off x="7269480" y="2752344"/>
             <a:ext cx="457200" cy="457200"/>
           </a:xfrm>
           <a:prstGeom prst="ellipse">
@@ -7628,13 +7823,13 @@
       </p:sp>
       <p:sp>
         <p:nvSpPr>
-          <p:cNvPr id="7" name="Text 5"/>
-          <p:cNvSpPr txBox="1"/>
-          <p:nvPr/>
-        </p:nvSpPr>
-        <p:spPr>
-          <a:xfrm>
-            <a:off x="7818120" y="2450592"/>
+          <p:cNvPr id="8" name="Text 6"/>
+          <p:cNvSpPr txBox="1"/>
+          <p:nvPr/>
+        </p:nvSpPr>
+        <p:spPr>
+          <a:xfrm>
+            <a:off x="7818120" y="2779776"/>
             <a:ext cx="3657600" cy="411480"/>
           </a:xfrm>
           <a:prstGeom prst="rect">
@@ -7667,14 +7862,14 @@
       </p:sp>
       <p:sp>
         <p:nvSpPr>
-          <p:cNvPr id="8" name="Text 6"/>
-          <p:cNvSpPr txBox="1"/>
-          <p:nvPr/>
-        </p:nvSpPr>
-        <p:spPr>
-          <a:xfrm>
-            <a:off x="7269480" y="3108960"/>
-            <a:ext cx="4160520" cy="2286000"/>
+          <p:cNvPr id="9" name="Text 7"/>
+          <p:cNvSpPr txBox="1"/>
+          <p:nvPr/>
+        </p:nvSpPr>
+        <p:spPr>
+          <a:xfrm>
+            <a:off x="7269480" y="3438144"/>
+            <a:ext cx="4160520" cy="1865376"/>
           </a:xfrm>
           <a:prstGeom prst="rect">
             <a:avLst/>
@@ -7706,7 +7901,7 @@
       </p:sp>
       <p:sp>
         <p:nvSpPr>
-          <p:cNvPr id="9" name="Shape 7"/>
+          <p:cNvPr id="10" name="Shape 8"/>
           <p:cNvSpPr/>
           <p:nvPr/>
         </p:nvSpPr>
@@ -7728,7 +7923,7 @@
       </p:sp>
       <p:sp>
         <p:nvSpPr>
-          <p:cNvPr id="10" name="Text 8"/>
+          <p:cNvPr id="11" name="Text 9"/>
           <p:cNvSpPr txBox="1"/>
           <p:nvPr/>
         </p:nvSpPr>
@@ -7767,7 +7962,7 @@
       </p:sp>
       <p:sp>
         <p:nvSpPr>
-          <p:cNvPr id="11" name="Text 9"/>
+          <p:cNvPr id="12" name="Text 10"/>
           <p:cNvSpPr txBox="1"/>
           <p:nvPr/>
         </p:nvSpPr>
@@ -7806,7 +8001,7 @@
       </p:sp>
       <p:sp>
         <p:nvSpPr>
-          <p:cNvPr id="12" name="Text 10"/>
+          <p:cNvPr id="13" name="Text 11"/>
           <p:cNvSpPr txBox="1"/>
           <p:nvPr/>
         </p:nvSpPr>
@@ -7955,13 +8150,52 @@
       </p:sp>
       <p:sp>
         <p:nvSpPr>
-          <p:cNvPr id="4" name="Shape 2"/>
+          <p:cNvPr id="4" name="Text 2"/>
+          <p:cNvSpPr txBox="1"/>
+          <p:nvPr/>
+        </p:nvSpPr>
+        <p:spPr>
+          <a:xfrm>
+            <a:off x="548640" y="1627632"/>
+            <a:ext cx="10881360" cy="502920"/>
+          </a:xfrm>
+          <a:prstGeom prst="rect">
+            <a:avLst/>
+          </a:prstGeom>
+          <a:noFill/>
+          <a:ln/>
+        </p:spPr>
+        <p:txBody>
+          <a:bodyPr wrap="square" lIns="0" tIns="0" rIns="0" bIns="0" rtlCol="0" anchor="t"/>
+          <a:lstStyle/>
+          <a:p>
+            <a:pPr algn="l" indent="0" marL="0">
+              <a:buNone/>
+            </a:pPr>
+            <a:r>
+              <a:rPr lang="en-US" sz="1500" dirty="0">
+                <a:solidFill>
+                  <a:srgbClr val="A9B1D6"/>
+                </a:solidFill>
+                <a:latin typeface="Calibri" pitchFamily="34" charset="0"/>
+                <a:ea typeface="Calibri" pitchFamily="34" charset="-122"/>
+                <a:cs typeface="Calibri" pitchFamily="34" charset="-120"/>
+              </a:rPr>
+              <a:t>When your RAG bot gives a bad answer it's usually one of these four — and each has a concrete fix.</a:t>
+            </a:r>
+            <a:endParaRPr lang="en-US" sz="1500" dirty="0"/>
+          </a:p>
+        </p:txBody>
+      </p:sp>
+      <p:sp>
+        <p:nvSpPr>
+          <p:cNvPr id="5" name="Shape 3"/>
           <p:cNvSpPr/>
           <p:nvPr/>
         </p:nvSpPr>
         <p:spPr>
           <a:xfrm>
-            <a:off x="548640" y="2103120"/>
+            <a:off x="548640" y="2432304"/>
             <a:ext cx="5394960" cy="1810512"/>
           </a:xfrm>
           <a:prstGeom prst="roundRect">
@@ -7982,13 +8216,13 @@
       </p:sp>
       <p:sp>
         <p:nvSpPr>
-          <p:cNvPr id="5" name="Shape 3"/>
+          <p:cNvPr id="6" name="Shape 4"/>
           <p:cNvSpPr/>
           <p:nvPr/>
         </p:nvSpPr>
         <p:spPr>
           <a:xfrm>
-            <a:off x="822960" y="2395728"/>
+            <a:off x="822960" y="2724912"/>
             <a:ext cx="548640" cy="548640"/>
           </a:xfrm>
           <a:prstGeom prst="ellipse">
@@ -8002,13 +8236,13 @@
       </p:sp>
       <p:sp>
         <p:nvSpPr>
-          <p:cNvPr id="6" name="Text 4"/>
-          <p:cNvSpPr txBox="1"/>
-          <p:nvPr/>
-        </p:nvSpPr>
-        <p:spPr>
-          <a:xfrm>
-            <a:off x="822960" y="2395728"/>
+          <p:cNvPr id="7" name="Text 5"/>
+          <p:cNvSpPr txBox="1"/>
+          <p:nvPr/>
+        </p:nvSpPr>
+        <p:spPr>
+          <a:xfrm>
+            <a:off x="822960" y="2724912"/>
             <a:ext cx="548640" cy="548640"/>
           </a:xfrm>
           <a:prstGeom prst="rect">
@@ -8041,13 +8275,13 @@
       </p:sp>
       <p:sp>
         <p:nvSpPr>
-          <p:cNvPr id="7" name="Text 5"/>
-          <p:cNvSpPr txBox="1"/>
-          <p:nvPr/>
-        </p:nvSpPr>
-        <p:spPr>
-          <a:xfrm>
-            <a:off x="1508760" y="2359152"/>
+          <p:cNvPr id="8" name="Text 6"/>
+          <p:cNvSpPr txBox="1"/>
+          <p:nvPr/>
+        </p:nvSpPr>
+        <p:spPr>
+          <a:xfrm>
+            <a:off x="1508760" y="2688336"/>
             <a:ext cx="4206240" cy="548640"/>
           </a:xfrm>
           <a:prstGeom prst="rect">
@@ -8080,13 +8314,13 @@
       </p:sp>
       <p:sp>
         <p:nvSpPr>
-          <p:cNvPr id="8" name="Text 6"/>
-          <p:cNvSpPr txBox="1"/>
-          <p:nvPr/>
-        </p:nvSpPr>
-        <p:spPr>
-          <a:xfrm>
-            <a:off x="822960" y="3017520"/>
+          <p:cNvPr id="9" name="Text 7"/>
+          <p:cNvSpPr txBox="1"/>
+          <p:nvPr/>
+        </p:nvSpPr>
+        <p:spPr>
+          <a:xfrm>
+            <a:off x="822960" y="3346704"/>
             <a:ext cx="4846320" cy="822960"/>
           </a:xfrm>
           <a:prstGeom prst="rect">
@@ -8119,13 +8353,13 @@
       </p:sp>
       <p:sp>
         <p:nvSpPr>
-          <p:cNvPr id="9" name="Shape 7"/>
+          <p:cNvPr id="10" name="Shape 8"/>
           <p:cNvSpPr/>
           <p:nvPr/>
         </p:nvSpPr>
         <p:spPr>
           <a:xfrm>
-            <a:off x="6245352" y="2103120"/>
+            <a:off x="6245352" y="2432304"/>
             <a:ext cx="5394960" cy="1810512"/>
           </a:xfrm>
           <a:prstGeom prst="roundRect">
@@ -8146,13 +8380,13 @@
       </p:sp>
       <p:sp>
         <p:nvSpPr>
-          <p:cNvPr id="10" name="Shape 8"/>
+          <p:cNvPr id="11" name="Shape 9"/>
           <p:cNvSpPr/>
           <p:nvPr/>
         </p:nvSpPr>
         <p:spPr>
           <a:xfrm>
-            <a:off x="6519672" y="2395728"/>
+            <a:off x="6519672" y="2724912"/>
             <a:ext cx="548640" cy="548640"/>
           </a:xfrm>
           <a:prstGeom prst="ellipse">
@@ -8166,13 +8400,13 @@
       </p:sp>
       <p:sp>
         <p:nvSpPr>
-          <p:cNvPr id="11" name="Text 9"/>
-          <p:cNvSpPr txBox="1"/>
-          <p:nvPr/>
-        </p:nvSpPr>
-        <p:spPr>
-          <a:xfrm>
-            <a:off x="6519672" y="2395728"/>
+          <p:cNvPr id="12" name="Text 10"/>
+          <p:cNvSpPr txBox="1"/>
+          <p:nvPr/>
+        </p:nvSpPr>
+        <p:spPr>
+          <a:xfrm>
+            <a:off x="6519672" y="2724912"/>
             <a:ext cx="548640" cy="548640"/>
           </a:xfrm>
           <a:prstGeom prst="rect">
@@ -8205,13 +8439,13 @@
       </p:sp>
       <p:sp>
         <p:nvSpPr>
-          <p:cNvPr id="12" name="Text 10"/>
-          <p:cNvSpPr txBox="1"/>
-          <p:nvPr/>
-        </p:nvSpPr>
-        <p:spPr>
-          <a:xfrm>
-            <a:off x="7205472" y="2359152"/>
+          <p:cNvPr id="13" name="Text 11"/>
+          <p:cNvSpPr txBox="1"/>
+          <p:nvPr/>
+        </p:nvSpPr>
+        <p:spPr>
+          <a:xfrm>
+            <a:off x="7205472" y="2688336"/>
             <a:ext cx="4206240" cy="548640"/>
           </a:xfrm>
           <a:prstGeom prst="rect">
@@ -8244,13 +8478,13 @@
       </p:sp>
       <p:sp>
         <p:nvSpPr>
-          <p:cNvPr id="13" name="Text 11"/>
-          <p:cNvSpPr txBox="1"/>
-          <p:nvPr/>
-        </p:nvSpPr>
-        <p:spPr>
-          <a:xfrm>
-            <a:off x="6519672" y="3017520"/>
+          <p:cNvPr id="14" name="Text 12"/>
+          <p:cNvSpPr txBox="1"/>
+          <p:nvPr/>
+        </p:nvSpPr>
+        <p:spPr>
+          <a:xfrm>
+            <a:off x="6519672" y="3346704"/>
             <a:ext cx="4846320" cy="822960"/>
           </a:xfrm>
           <a:prstGeom prst="rect">
@@ -8283,13 +8517,13 @@
       </p:sp>
       <p:sp>
         <p:nvSpPr>
-          <p:cNvPr id="14" name="Shape 12"/>
+          <p:cNvPr id="15" name="Shape 13"/>
           <p:cNvSpPr/>
           <p:nvPr/>
         </p:nvSpPr>
         <p:spPr>
           <a:xfrm>
-            <a:off x="548640" y="4114800"/>
+            <a:off x="548640" y="4443984"/>
             <a:ext cx="5394960" cy="1810512"/>
           </a:xfrm>
           <a:prstGeom prst="roundRect">
@@ -8310,13 +8544,13 @@
       </p:sp>
       <p:sp>
         <p:nvSpPr>
-          <p:cNvPr id="15" name="Shape 13"/>
+          <p:cNvPr id="16" name="Shape 14"/>
           <p:cNvSpPr/>
           <p:nvPr/>
         </p:nvSpPr>
         <p:spPr>
           <a:xfrm>
-            <a:off x="822960" y="4407408"/>
+            <a:off x="822960" y="4736592"/>
             <a:ext cx="548640" cy="548640"/>
           </a:xfrm>
           <a:prstGeom prst="ellipse">
@@ -8330,13 +8564,13 @@
       </p:sp>
       <p:sp>
         <p:nvSpPr>
-          <p:cNvPr id="16" name="Text 14"/>
-          <p:cNvSpPr txBox="1"/>
-          <p:nvPr/>
-        </p:nvSpPr>
-        <p:spPr>
-          <a:xfrm>
-            <a:off x="822960" y="4407408"/>
+          <p:cNvPr id="17" name="Text 15"/>
+          <p:cNvSpPr txBox="1"/>
+          <p:nvPr/>
+        </p:nvSpPr>
+        <p:spPr>
+          <a:xfrm>
+            <a:off x="822960" y="4736592"/>
             <a:ext cx="548640" cy="548640"/>
           </a:xfrm>
           <a:prstGeom prst="rect">
@@ -8369,13 +8603,13 @@
       </p:sp>
       <p:sp>
         <p:nvSpPr>
-          <p:cNvPr id="17" name="Text 15"/>
-          <p:cNvSpPr txBox="1"/>
-          <p:nvPr/>
-        </p:nvSpPr>
-        <p:spPr>
-          <a:xfrm>
-            <a:off x="1508760" y="4370832"/>
+          <p:cNvPr id="18" name="Text 16"/>
+          <p:cNvSpPr txBox="1"/>
+          <p:nvPr/>
+        </p:nvSpPr>
+        <p:spPr>
+          <a:xfrm>
+            <a:off x="1508760" y="4700016"/>
             <a:ext cx="4206240" cy="548640"/>
           </a:xfrm>
           <a:prstGeom prst="rect">
@@ -8408,13 +8642,13 @@
       </p:sp>
       <p:sp>
         <p:nvSpPr>
-          <p:cNvPr id="18" name="Text 16"/>
-          <p:cNvSpPr txBox="1"/>
-          <p:nvPr/>
-        </p:nvSpPr>
-        <p:spPr>
-          <a:xfrm>
-            <a:off x="822960" y="5029200"/>
+          <p:cNvPr id="19" name="Text 17"/>
+          <p:cNvSpPr txBox="1"/>
+          <p:nvPr/>
+        </p:nvSpPr>
+        <p:spPr>
+          <a:xfrm>
+            <a:off x="822960" y="5358384"/>
             <a:ext cx="4846320" cy="822960"/>
           </a:xfrm>
           <a:prstGeom prst="rect">
@@ -8447,13 +8681,13 @@
       </p:sp>
       <p:sp>
         <p:nvSpPr>
-          <p:cNvPr id="19" name="Shape 17"/>
+          <p:cNvPr id="20" name="Shape 18"/>
           <p:cNvSpPr/>
           <p:nvPr/>
         </p:nvSpPr>
         <p:spPr>
           <a:xfrm>
-            <a:off x="6245352" y="4114800"/>
+            <a:off x="6245352" y="4443984"/>
             <a:ext cx="5394960" cy="1810512"/>
           </a:xfrm>
           <a:prstGeom prst="roundRect">
@@ -8474,13 +8708,13 @@
       </p:sp>
       <p:sp>
         <p:nvSpPr>
-          <p:cNvPr id="20" name="Shape 18"/>
+          <p:cNvPr id="21" name="Shape 19"/>
           <p:cNvSpPr/>
           <p:nvPr/>
         </p:nvSpPr>
         <p:spPr>
           <a:xfrm>
-            <a:off x="6519672" y="4407408"/>
+            <a:off x="6519672" y="4736592"/>
             <a:ext cx="548640" cy="548640"/>
           </a:xfrm>
           <a:prstGeom prst="ellipse">
@@ -8494,13 +8728,13 @@
       </p:sp>
       <p:sp>
         <p:nvSpPr>
-          <p:cNvPr id="21" name="Text 19"/>
-          <p:cNvSpPr txBox="1"/>
-          <p:nvPr/>
-        </p:nvSpPr>
-        <p:spPr>
-          <a:xfrm>
-            <a:off x="6519672" y="4407408"/>
+          <p:cNvPr id="22" name="Text 20"/>
+          <p:cNvSpPr txBox="1"/>
+          <p:nvPr/>
+        </p:nvSpPr>
+        <p:spPr>
+          <a:xfrm>
+            <a:off x="6519672" y="4736592"/>
             <a:ext cx="548640" cy="548640"/>
           </a:xfrm>
           <a:prstGeom prst="rect">
@@ -8533,13 +8767,13 @@
       </p:sp>
       <p:sp>
         <p:nvSpPr>
-          <p:cNvPr id="22" name="Text 20"/>
-          <p:cNvSpPr txBox="1"/>
-          <p:nvPr/>
-        </p:nvSpPr>
-        <p:spPr>
-          <a:xfrm>
-            <a:off x="7205472" y="4370832"/>
+          <p:cNvPr id="23" name="Text 21"/>
+          <p:cNvSpPr txBox="1"/>
+          <p:nvPr/>
+        </p:nvSpPr>
+        <p:spPr>
+          <a:xfrm>
+            <a:off x="7205472" y="4700016"/>
             <a:ext cx="4206240" cy="548640"/>
           </a:xfrm>
           <a:prstGeom prst="rect">
@@ -8572,13 +8806,13 @@
       </p:sp>
       <p:sp>
         <p:nvSpPr>
-          <p:cNvPr id="23" name="Text 21"/>
-          <p:cNvSpPr txBox="1"/>
-          <p:nvPr/>
-        </p:nvSpPr>
-        <p:spPr>
-          <a:xfrm>
-            <a:off x="6519672" y="5029200"/>
+          <p:cNvPr id="24" name="Text 22"/>
+          <p:cNvSpPr txBox="1"/>
+          <p:nvPr/>
+        </p:nvSpPr>
+        <p:spPr>
+          <a:xfrm>
+            <a:off x="6519672" y="5358384"/>
             <a:ext cx="4846320" cy="822960"/>
           </a:xfrm>
           <a:prstGeom prst="rect">
@@ -8611,7 +8845,7 @@
       </p:sp>
       <p:sp>
         <p:nvSpPr>
-          <p:cNvPr id="24" name="Shape 22"/>
+          <p:cNvPr id="25" name="Shape 23"/>
           <p:cNvSpPr/>
           <p:nvPr/>
         </p:nvSpPr>
@@ -8633,7 +8867,7 @@
       </p:sp>
       <p:sp>
         <p:nvSpPr>
-          <p:cNvPr id="25" name="Text 23"/>
+          <p:cNvPr id="26" name="Text 24"/>
           <p:cNvSpPr txBox="1"/>
           <p:nvPr/>
         </p:nvSpPr>
@@ -8672,7 +8906,7 @@
       </p:sp>
       <p:sp>
         <p:nvSpPr>
-          <p:cNvPr id="26" name="Text 24"/>
+          <p:cNvPr id="27" name="Text 25"/>
           <p:cNvSpPr txBox="1"/>
           <p:nvPr/>
         </p:nvSpPr>
@@ -8711,7 +8945,7 @@
       </p:sp>
       <p:sp>
         <p:nvSpPr>
-          <p:cNvPr id="27" name="Text 25"/>
+          <p:cNvPr id="28" name="Text 26"/>
           <p:cNvSpPr txBox="1"/>
           <p:nvPr/>
         </p:nvSpPr>
